--- a/slides/RE024_Touch_Inspector_FAE客戶版.pptx
+++ b/slides/RE024_Touch_Inspector_FAE客戶版.pptx
@@ -4681,7 +4681,7 @@
       </p:sp>
       <p:pic>
         <p:nvPicPr>
-          <p:cNvPr id="6" name="Picture 5" descr="record_fae.png"/>
+          <p:cNvPr id="6" name="Picture 5" descr="08_record.png"/>
           <p:cNvPicPr>
             <a:picLocks noChangeAspect="1"/>
           </p:cNvPicPr>
@@ -4695,8 +4695,8 @@
         </p:blipFill>
         <p:spPr>
           <a:xfrm>
-            <a:off x="457200" y="2568404"/>
-            <a:ext cx="6309360" cy="2635591"/>
+            <a:off x="457200" y="2990731"/>
+            <a:ext cx="6309360" cy="1790938"/>
           </a:xfrm>
           <a:prstGeom prst="rect">
             <a:avLst/>
